--- a/5-Folgen-Grenzwerte-Stetigkeit/5-Abbildungen/magl-5-stetigkeit.pptx
+++ b/5-Folgen-Grenzwerte-Stetigkeit/5-Abbildungen/magl-5-stetigkeit.pptx
@@ -243,7 +243,7 @@
           <a:p>
             <a:fld id="{6D4DEAE2-FC02-458F-97F0-94AA5692BFD8}" type="datetimeFigureOut">
               <a:rPr lang="de-DE" smtClean="0"/>
-              <a:t>27.09.2026</a:t>
+              <a:t>05.10.2026</a:t>
             </a:fld>
             <a:endParaRPr lang="de-DE"/>
           </a:p>
@@ -413,7 +413,7 @@
           <a:p>
             <a:fld id="{6D4DEAE2-FC02-458F-97F0-94AA5692BFD8}" type="datetimeFigureOut">
               <a:rPr lang="de-DE" smtClean="0"/>
-              <a:t>27.09.2026</a:t>
+              <a:t>05.10.2026</a:t>
             </a:fld>
             <a:endParaRPr lang="de-DE"/>
           </a:p>
@@ -593,7 +593,7 @@
           <a:p>
             <a:fld id="{6D4DEAE2-FC02-458F-97F0-94AA5692BFD8}" type="datetimeFigureOut">
               <a:rPr lang="de-DE" smtClean="0"/>
-              <a:t>27.09.2026</a:t>
+              <a:t>05.10.2026</a:t>
             </a:fld>
             <a:endParaRPr lang="de-DE"/>
           </a:p>
@@ -763,7 +763,7 @@
           <a:p>
             <a:fld id="{6D4DEAE2-FC02-458F-97F0-94AA5692BFD8}" type="datetimeFigureOut">
               <a:rPr lang="de-DE" smtClean="0"/>
-              <a:t>27.09.2026</a:t>
+              <a:t>05.10.2026</a:t>
             </a:fld>
             <a:endParaRPr lang="de-DE"/>
           </a:p>
@@ -1009,7 +1009,7 @@
           <a:p>
             <a:fld id="{6D4DEAE2-FC02-458F-97F0-94AA5692BFD8}" type="datetimeFigureOut">
               <a:rPr lang="de-DE" smtClean="0"/>
-              <a:t>27.09.2026</a:t>
+              <a:t>05.10.2026</a:t>
             </a:fld>
             <a:endParaRPr lang="de-DE"/>
           </a:p>
@@ -1241,7 +1241,7 @@
           <a:p>
             <a:fld id="{6D4DEAE2-FC02-458F-97F0-94AA5692BFD8}" type="datetimeFigureOut">
               <a:rPr lang="de-DE" smtClean="0"/>
-              <a:t>27.09.2026</a:t>
+              <a:t>05.10.2026</a:t>
             </a:fld>
             <a:endParaRPr lang="de-DE"/>
           </a:p>
@@ -1608,7 +1608,7 @@
           <a:p>
             <a:fld id="{6D4DEAE2-FC02-458F-97F0-94AA5692BFD8}" type="datetimeFigureOut">
               <a:rPr lang="de-DE" smtClean="0"/>
-              <a:t>27.09.2026</a:t>
+              <a:t>05.10.2026</a:t>
             </a:fld>
             <a:endParaRPr lang="de-DE"/>
           </a:p>
@@ -1726,7 +1726,7 @@
           <a:p>
             <a:fld id="{6D4DEAE2-FC02-458F-97F0-94AA5692BFD8}" type="datetimeFigureOut">
               <a:rPr lang="de-DE" smtClean="0"/>
-              <a:t>27.09.2026</a:t>
+              <a:t>05.10.2026</a:t>
             </a:fld>
             <a:endParaRPr lang="de-DE"/>
           </a:p>
@@ -1821,7 +1821,7 @@
           <a:p>
             <a:fld id="{6D4DEAE2-FC02-458F-97F0-94AA5692BFD8}" type="datetimeFigureOut">
               <a:rPr lang="de-DE" smtClean="0"/>
-              <a:t>27.09.2026</a:t>
+              <a:t>05.10.2026</a:t>
             </a:fld>
             <a:endParaRPr lang="de-DE"/>
           </a:p>
@@ -2098,7 +2098,7 @@
           <a:p>
             <a:fld id="{6D4DEAE2-FC02-458F-97F0-94AA5692BFD8}" type="datetimeFigureOut">
               <a:rPr lang="de-DE" smtClean="0"/>
-              <a:t>27.09.2026</a:t>
+              <a:t>05.10.2026</a:t>
             </a:fld>
             <a:endParaRPr lang="de-DE"/>
           </a:p>
@@ -2355,7 +2355,7 @@
           <a:p>
             <a:fld id="{6D4DEAE2-FC02-458F-97F0-94AA5692BFD8}" type="datetimeFigureOut">
               <a:rPr lang="de-DE" smtClean="0"/>
-              <a:t>27.09.2026</a:t>
+              <a:t>05.10.2026</a:t>
             </a:fld>
             <a:endParaRPr lang="de-DE"/>
           </a:p>
@@ -2568,7 +2568,7 @@
           <a:p>
             <a:fld id="{6D4DEAE2-FC02-458F-97F0-94AA5692BFD8}" type="datetimeFigureOut">
               <a:rPr lang="de-DE" smtClean="0"/>
-              <a:t>27.09.2026</a:t>
+              <a:t>05.10.2026</a:t>
             </a:fld>
             <a:endParaRPr lang="de-DE"/>
           </a:p>
@@ -2993,10 +2993,68 @@
           <a:prstGeom prst="rect">
             <a:avLst/>
           </a:prstGeom>
+          <a:noFill/>
+          <a:ln w="19050" cap="flat" cmpd="sng" algn="ctr">
+            <a:noFill/>
+            <a:prstDash val="solid"/>
+            <a:miter lim="800000"/>
+          </a:ln>
+          <a:effectLst/>
+        </p:spPr>
+        <p:style>
+          <a:lnRef idx="2">
+            <a:schemeClr val="accent1">
+              <a:shade val="15000"/>
+            </a:schemeClr>
+          </a:lnRef>
+          <a:fillRef idx="1">
+            <a:schemeClr val="accent1"/>
+          </a:fillRef>
+          <a:effectRef idx="0">
+            <a:schemeClr val="accent1"/>
+          </a:effectRef>
+          <a:fontRef idx="minor">
+            <a:schemeClr val="lt1"/>
+          </a:fontRef>
+        </p:style>
+        <p:txBody>
+          <a:bodyPr rtlCol="0" anchor="ctr"/>
+          <a:lstStyle/>
+          <a:p>
+            <a:pPr algn="ctr"/>
+            <a:endParaRPr lang="de-DE">
+              <a:solidFill>
+                <a:schemeClr val="tx1"/>
+              </a:solidFill>
+            </a:endParaRPr>
+          </a:p>
+        </p:txBody>
+      </p:sp>
+      <p:sp>
+        <p:nvSpPr>
+          <p:cNvPr id="3" name="Rechteck 2">
+            <a:extLst>
+              <a:ext uri="{FF2B5EF4-FFF2-40B4-BE49-F238E27FC236}">
+                <a16:creationId xmlns:a16="http://schemas.microsoft.com/office/drawing/2014/main" id="{AFB78064-92D0-2F16-8D39-E301BBCC57DF}"/>
+              </a:ext>
+            </a:extLst>
+          </p:cNvPr>
+          <p:cNvSpPr/>
+          <p:nvPr/>
+        </p:nvSpPr>
+        <p:spPr>
+          <a:xfrm>
+            <a:off x="1731582" y="350996"/>
+            <a:ext cx="1310385" cy="1754981"/>
+          </a:xfrm>
+          <a:prstGeom prst="rect">
+            <a:avLst/>
+          </a:prstGeom>
           <a:solidFill>
-            <a:srgbClr val="B43628">
-              <a:alpha val="5000"/>
-            </a:srgbClr>
+            <a:schemeClr val="bg1">
+              <a:lumMod val="95000"/>
+              <a:alpha val="6000"/>
+            </a:schemeClr>
           </a:solidFill>
           <a:ln w="19050" cap="flat" cmpd="sng" algn="ctr">
             <a:noFill/>
@@ -3026,64 +3084,11 @@
           <a:lstStyle/>
           <a:p>
             <a:pPr algn="ctr"/>
-            <a:endParaRPr lang="de-DE"/>
-          </a:p>
-        </p:txBody>
-      </p:sp>
-      <p:sp>
-        <p:nvSpPr>
-          <p:cNvPr id="3" name="Rechteck 2">
-            <a:extLst>
-              <a:ext uri="{FF2B5EF4-FFF2-40B4-BE49-F238E27FC236}">
-                <a16:creationId xmlns:a16="http://schemas.microsoft.com/office/drawing/2014/main" id="{AFB78064-92D0-2F16-8D39-E301BBCC57DF}"/>
-              </a:ext>
-            </a:extLst>
-          </p:cNvPr>
-          <p:cNvSpPr/>
-          <p:nvPr/>
-        </p:nvSpPr>
-        <p:spPr>
-          <a:xfrm>
-            <a:off x="1731582" y="350996"/>
-            <a:ext cx="1310385" cy="1754981"/>
-          </a:xfrm>
-          <a:prstGeom prst="rect">
-            <a:avLst/>
-          </a:prstGeom>
-          <a:solidFill>
-            <a:srgbClr val="00579D">
-              <a:alpha val="6000"/>
-            </a:srgbClr>
-          </a:solidFill>
-          <a:ln w="19050" cap="flat" cmpd="sng" algn="ctr">
-            <a:noFill/>
-            <a:prstDash val="solid"/>
-            <a:miter lim="800000"/>
-          </a:ln>
-          <a:effectLst/>
-        </p:spPr>
-        <p:style>
-          <a:lnRef idx="2">
-            <a:schemeClr val="accent1">
-              <a:shade val="15000"/>
-            </a:schemeClr>
-          </a:lnRef>
-          <a:fillRef idx="1">
-            <a:schemeClr val="accent1"/>
-          </a:fillRef>
-          <a:effectRef idx="0">
-            <a:schemeClr val="accent1"/>
-          </a:effectRef>
-          <a:fontRef idx="minor">
-            <a:schemeClr val="lt1"/>
-          </a:fontRef>
-        </p:style>
-        <p:txBody>
-          <a:bodyPr rtlCol="0" anchor="ctr"/>
-          <a:lstStyle/>
-          <a:p>
-            <a:pPr algn="ctr"/>
-            <a:endParaRPr lang="de-DE"/>
+            <a:endParaRPr lang="de-DE" dirty="0">
+              <a:solidFill>
+                <a:schemeClr val="tx1"/>
+              </a:solidFill>
+            </a:endParaRPr>
           </a:p>
         </p:txBody>
       </p:sp>
@@ -3197,7 +3202,9 @@
           </a:prstGeom>
           <a:ln w="7620">
             <a:solidFill>
-              <a:srgbClr val="00579D"/>
+              <a:schemeClr val="bg1">
+                <a:lumMod val="75000"/>
+              </a:schemeClr>
             </a:solidFill>
             <a:prstDash val="dash"/>
             <a:headEnd type="none" w="sm" len="sm"/>
@@ -3241,7 +3248,9 @@
           </a:prstGeom>
           <a:ln w="7620">
             <a:solidFill>
-              <a:srgbClr val="00579D"/>
+              <a:schemeClr val="bg1">
+                <a:lumMod val="75000"/>
+              </a:schemeClr>
             </a:solidFill>
             <a:prstDash val="dash"/>
             <a:headEnd type="none" w="sm" len="sm"/>
@@ -3285,7 +3294,9 @@
           </a:prstGeom>
           <a:ln w="7620">
             <a:solidFill>
-              <a:srgbClr val="B43628"/>
+              <a:schemeClr val="bg1">
+                <a:lumMod val="75000"/>
+              </a:schemeClr>
             </a:solidFill>
             <a:prstDash val="dash"/>
             <a:headEnd type="none" w="sm" len="sm"/>
@@ -3329,7 +3340,9 @@
           </a:prstGeom>
           <a:ln w="7620">
             <a:solidFill>
-              <a:srgbClr val="B43628"/>
+              <a:schemeClr val="bg1">
+                <a:lumMod val="75000"/>
+              </a:schemeClr>
             </a:solidFill>
             <a:prstDash val="dash"/>
             <a:headEnd type="none" w="sm" len="sm"/>
@@ -3376,7 +3389,9 @@
           </a:prstGeom>
           <a:ln w="5715">
             <a:solidFill>
-              <a:srgbClr val="8C8C8C"/>
+              <a:schemeClr val="bg1">
+                <a:lumMod val="75000"/>
+              </a:schemeClr>
             </a:solidFill>
             <a:prstDash val="dash"/>
             <a:headEnd type="none" w="sm" len="sm"/>
@@ -3422,7 +3437,9 @@
           </a:prstGeom>
           <a:ln w="5715">
             <a:solidFill>
-              <a:srgbClr val="8C8C8C"/>
+              <a:schemeClr val="bg1">
+                <a:lumMod val="75000"/>
+              </a:schemeClr>
             </a:solidFill>
             <a:prstDash val="dash"/>
             <a:headEnd type="none" w="sm" len="sm"/>
@@ -3466,7 +3483,9 @@
           </a:prstGeom>
           <a:ln w="5715">
             <a:solidFill>
-              <a:srgbClr val="8C8C8C"/>
+              <a:schemeClr val="bg1">
+                <a:lumMod val="75000"/>
+              </a:schemeClr>
             </a:solidFill>
             <a:prstDash val="dash"/>
             <a:headEnd type="none" w="sm" len="sm"/>
@@ -3510,7 +3529,9 @@
           </a:prstGeom>
           <a:ln w="5715">
             <a:solidFill>
-              <a:srgbClr val="8C8C8C"/>
+              <a:schemeClr val="bg1">
+                <a:lumMod val="75000"/>
+              </a:schemeClr>
             </a:solidFill>
             <a:prstDash val="dash"/>
             <a:headEnd type="none" w="sm" len="sm"/>
@@ -3598,7 +3619,7 @@
           </a:prstGeom>
           <a:ln w="7620">
             <a:solidFill>
-              <a:srgbClr val="00579D"/>
+              <a:schemeClr val="tx1"/>
             </a:solidFill>
             <a:prstDash val="solid"/>
             <a:headEnd type="triangle" w="sm" len="sm"/>
@@ -3642,7 +3663,7 @@
           </a:prstGeom>
           <a:ln w="7620">
             <a:solidFill>
-              <a:srgbClr val="00579D"/>
+              <a:schemeClr val="tx1"/>
             </a:solidFill>
             <a:prstDash val="solid"/>
             <a:headEnd type="triangle" w="sm" len="sm"/>
@@ -4283,7 +4304,7 @@
                       <m:r>
                         <a:rPr lang="de-DE" sz="921" b="0" i="1" smtClean="0">
                           <a:solidFill>
-                            <a:srgbClr val="00579D"/>
+                            <a:schemeClr val="tx1"/>
                           </a:solidFill>
                           <a:latin typeface="Cambria Math" panose="02040503050406030204" pitchFamily="18" charset="0"/>
                         </a:rPr>
@@ -4292,7 +4313,7 @@
                       <m:r>
                         <a:rPr lang="de-DE" sz="921" b="0" i="1" smtClean="0">
                           <a:solidFill>
-                            <a:srgbClr val="00579D"/>
+                            <a:schemeClr val="tx1"/>
                           </a:solidFill>
                           <a:latin typeface="Cambria Math" panose="02040503050406030204" pitchFamily="18" charset="0"/>
                         </a:rPr>
@@ -4301,7 +4322,7 @@
                       <m:r>
                         <a:rPr lang="de-DE" sz="921" b="0" i="1" smtClean="0">
                           <a:solidFill>
-                            <a:srgbClr val="00579D"/>
+                            <a:schemeClr val="tx1"/>
                           </a:solidFill>
                           <a:latin typeface="Cambria Math" panose="02040503050406030204" pitchFamily="18" charset="0"/>
                         </a:rPr>
@@ -4312,7 +4333,7 @@
                 </a14:m>
                 <a:endParaRPr lang="de-DE" sz="921" dirty="0">
                   <a:solidFill>
-                    <a:srgbClr val="00579D"/>
+                    <a:schemeClr val="tx1"/>
                   </a:solidFill>
                   <a:latin typeface="Cambria Math" panose="02040503050406030204" pitchFamily="18" charset="0"/>
                 </a:endParaRPr>
@@ -4402,7 +4423,7 @@
                       <m:r>
                         <a:rPr lang="de-DE" sz="995" b="0" i="1" smtClean="0">
                           <a:solidFill>
-                            <a:srgbClr val="000000"/>
+                            <a:schemeClr val="tx1"/>
                           </a:solidFill>
                           <a:latin typeface="Cambria Math" panose="02040503050406030204" pitchFamily="18" charset="0"/>
                         </a:rPr>
@@ -4413,7 +4434,7 @@
                 </a14:m>
                 <a:endParaRPr lang="de-DE" sz="995" dirty="0">
                   <a:solidFill>
-                    <a:srgbClr val="000000"/>
+                    <a:schemeClr val="tx1"/>
                   </a:solidFill>
                   <a:latin typeface="Cambria Math" panose="02040503050406030204" pitchFamily="18" charset="0"/>
                 </a:endParaRPr>
@@ -4503,7 +4524,7 @@
                       <m:r>
                         <a:rPr lang="de-DE" sz="995" b="0" i="1" dirty="0" smtClean="0">
                           <a:solidFill>
-                            <a:srgbClr val="000000"/>
+                            <a:schemeClr val="tx1"/>
                           </a:solidFill>
                           <a:latin typeface="Cambria Math" panose="02040503050406030204" pitchFamily="18" charset="0"/>
                         </a:rPr>
@@ -4512,6 +4533,11 @@
                     </m:oMath>
                   </m:oMathPara>
                 </a14:m>
+                <a:endParaRPr lang="de-DE">
+                  <a:solidFill>
+                    <a:schemeClr val="tx1"/>
+                  </a:solidFill>
+                </a:endParaRPr>
               </a:p>
             </p:txBody>
           </p:sp>
@@ -4542,7 +4568,7 @@
               <a:blipFill>
                 <a:blip r:embed="rId4"/>
                 <a:stretch>
-                  <a:fillRect l="-29412" t="-24000" r="-76471" b="-52000"/>
+                  <a:fillRect l="-29412"/>
                 </a:stretch>
               </a:blipFill>
             </p:spPr>
@@ -4598,7 +4624,7 @@
                       <m:r>
                         <a:rPr lang="de-DE" sz="921" b="0" i="1" smtClean="0">
                           <a:solidFill>
-                            <a:srgbClr val="00579D"/>
+                            <a:schemeClr val="tx1"/>
                           </a:solidFill>
                           <a:latin typeface="Cambria Math" panose="02040503050406030204" pitchFamily="18" charset="0"/>
                         </a:rPr>
@@ -4607,7 +4633,7 @@
                       <m:r>
                         <a:rPr lang="de-DE" sz="921" b="0" i="1" smtClean="0">
                           <a:solidFill>
-                            <a:srgbClr val="00579D"/>
+                            <a:schemeClr val="tx1"/>
                           </a:solidFill>
                           <a:latin typeface="Cambria Math" panose="02040503050406030204" pitchFamily="18" charset="0"/>
                         </a:rPr>
@@ -4616,7 +4642,7 @@
                       <m:r>
                         <a:rPr lang="de-DE" sz="921" b="0" i="1" smtClean="0">
                           <a:solidFill>
-                            <a:srgbClr val="00579D"/>
+                            <a:schemeClr val="tx1"/>
                           </a:solidFill>
                           <a:latin typeface="Cambria Math" panose="02040503050406030204" pitchFamily="18" charset="0"/>
                         </a:rPr>
@@ -4627,7 +4653,7 @@
                 </a14:m>
                 <a:endParaRPr lang="de-DE" sz="921" dirty="0">
                   <a:solidFill>
-                    <a:srgbClr val="00579D"/>
+                    <a:schemeClr val="tx1"/>
                   </a:solidFill>
                   <a:latin typeface="Cambria Math" panose="02040503050406030204" pitchFamily="18" charset="0"/>
                 </a:endParaRPr>
@@ -4717,7 +4743,7 @@
                       <m:r>
                         <a:rPr lang="de-DE" sz="995" b="0" i="1" smtClean="0">
                           <a:solidFill>
-                            <a:srgbClr val="B43628"/>
+                            <a:schemeClr val="tx1"/>
                           </a:solidFill>
                           <a:latin typeface="Cambria Math" panose="02040503050406030204" pitchFamily="18" charset="0"/>
                         </a:rPr>
@@ -4728,7 +4754,7 @@
                           <m:ctrlPr>
                             <a:rPr lang="de-DE" sz="995" b="0" i="1" smtClean="0">
                               <a:solidFill>
-                                <a:srgbClr val="B43628"/>
+                                <a:schemeClr val="tx1"/>
                               </a:solidFill>
                               <a:latin typeface="Cambria Math" panose="02040503050406030204" pitchFamily="18" charset="0"/>
                             </a:rPr>
@@ -4738,7 +4764,7 @@
                           <m:r>
                             <a:rPr lang="de-DE" sz="995" b="0" i="1" smtClean="0">
                               <a:solidFill>
-                                <a:srgbClr val="B43628"/>
+                                <a:schemeClr val="tx1"/>
                               </a:solidFill>
                               <a:latin typeface="Cambria Math" panose="02040503050406030204" pitchFamily="18" charset="0"/>
                             </a:rPr>
@@ -4749,7 +4775,7 @@
                       <m:r>
                         <a:rPr lang="de-DE" sz="995" b="0" i="1" smtClean="0">
                           <a:solidFill>
-                            <a:srgbClr val="B43628"/>
+                            <a:schemeClr val="tx1"/>
                           </a:solidFill>
                           <a:latin typeface="Cambria Math" panose="02040503050406030204" pitchFamily="18" charset="0"/>
                         </a:rPr>
@@ -4758,7 +4784,7 @@
                       <m:r>
                         <a:rPr lang="de-DE" sz="995" b="0" i="1" smtClean="0">
                           <a:solidFill>
-                            <a:srgbClr val="B43628"/>
+                            <a:schemeClr val="tx1"/>
                           </a:solidFill>
                           <a:latin typeface="Cambria Math" panose="02040503050406030204" pitchFamily="18" charset="0"/>
                         </a:rPr>
@@ -4769,7 +4795,7 @@
                 </a14:m>
                 <a:endParaRPr lang="de-DE" sz="995" dirty="0">
                   <a:solidFill>
-                    <a:srgbClr val="B43628"/>
+                    <a:schemeClr val="tx1"/>
                   </a:solidFill>
                   <a:latin typeface="Cambria Math" panose="02040503050406030204" pitchFamily="18" charset="0"/>
                 </a:endParaRPr>
@@ -4859,7 +4885,7 @@
                       <m:r>
                         <a:rPr lang="de-DE" sz="995" b="0" i="1" smtClean="0">
                           <a:solidFill>
-                            <a:srgbClr val="000000"/>
+                            <a:schemeClr val="tx1"/>
                           </a:solidFill>
                           <a:latin typeface="Cambria Math" panose="02040503050406030204" pitchFamily="18" charset="0"/>
                         </a:rPr>
@@ -4868,7 +4894,7 @@
                       <m:r>
                         <a:rPr lang="de-DE" sz="995" b="0" i="1" smtClean="0">
                           <a:solidFill>
-                            <a:srgbClr val="000000"/>
+                            <a:schemeClr val="tx1"/>
                           </a:solidFill>
                           <a:latin typeface="Cambria Math" panose="02040503050406030204" pitchFamily="18" charset="0"/>
                         </a:rPr>
@@ -4877,7 +4903,7 @@
                       <m:r>
                         <a:rPr lang="de-DE" sz="995" b="0" i="1" smtClean="0">
                           <a:solidFill>
-                            <a:srgbClr val="000000"/>
+                            <a:schemeClr val="tx1"/>
                           </a:solidFill>
                           <a:latin typeface="Cambria Math" panose="02040503050406030204" pitchFamily="18" charset="0"/>
                         </a:rPr>
@@ -4886,7 +4912,7 @@
                       <m:r>
                         <a:rPr lang="de-DE" sz="995" b="0" i="1" smtClean="0">
                           <a:solidFill>
-                            <a:srgbClr val="000000"/>
+                            <a:schemeClr val="tx1"/>
                           </a:solidFill>
                           <a:latin typeface="Cambria Math" panose="02040503050406030204" pitchFamily="18" charset="0"/>
                         </a:rPr>
@@ -4897,7 +4923,7 @@
                 </a14:m>
                 <a:endParaRPr lang="de-DE" sz="995" dirty="0">
                   <a:solidFill>
-                    <a:srgbClr val="000000"/>
+                    <a:schemeClr val="tx1"/>
                   </a:solidFill>
                   <a:latin typeface="Cambria Math" panose="02040503050406030204" pitchFamily="18" charset="0"/>
                 </a:endParaRPr>
@@ -4987,7 +5013,7 @@
                       <m:r>
                         <a:rPr lang="de-DE" sz="995" b="0" i="1" smtClean="0">
                           <a:solidFill>
-                            <a:srgbClr val="000000"/>
+                            <a:schemeClr val="tx1"/>
                           </a:solidFill>
                           <a:latin typeface="Cambria Math" panose="02040503050406030204" pitchFamily="18" charset="0"/>
                         </a:rPr>
@@ -4996,7 +5022,7 @@
                       <m:r>
                         <a:rPr lang="de-DE" sz="995" b="0" i="1" smtClean="0">
                           <a:solidFill>
-                            <a:srgbClr val="000000"/>
+                            <a:schemeClr val="tx1"/>
                           </a:solidFill>
                           <a:latin typeface="Cambria Math" panose="02040503050406030204" pitchFamily="18" charset="0"/>
                         </a:rPr>
@@ -5005,7 +5031,7 @@
                       <m:r>
                         <a:rPr lang="de-DE" sz="995" b="0" i="1" smtClean="0">
                           <a:solidFill>
-                            <a:srgbClr val="000000"/>
+                            <a:schemeClr val="tx1"/>
                           </a:solidFill>
                           <a:latin typeface="Cambria Math" panose="02040503050406030204" pitchFamily="18" charset="0"/>
                         </a:rPr>
@@ -5014,7 +5040,7 @@
                       <m:r>
                         <a:rPr lang="de-DE" sz="995" b="0" i="1" smtClean="0">
                           <a:solidFill>
-                            <a:srgbClr val="000000"/>
+                            <a:schemeClr val="tx1"/>
                           </a:solidFill>
                           <a:latin typeface="Cambria Math" panose="02040503050406030204" pitchFamily="18" charset="0"/>
                         </a:rPr>
@@ -5025,7 +5051,7 @@
                 </a14:m>
                 <a:endParaRPr lang="de-DE" sz="995" dirty="0">
                   <a:solidFill>
-                    <a:srgbClr val="000000"/>
+                    <a:schemeClr val="tx1"/>
                   </a:solidFill>
                   <a:latin typeface="Cambria Math" panose="02040503050406030204" pitchFamily="18" charset="0"/>
                 </a:endParaRPr>
@@ -5112,7 +5138,7 @@
                 <a:r>
                   <a:rPr lang="de-DE" sz="958" dirty="0">
                     <a:solidFill>
-                      <a:srgbClr val="000000"/>
+                      <a:schemeClr val="tx1"/>
                     </a:solidFill>
                     <a:latin typeface="Cambria Math" panose="02040503050406030204" pitchFamily="18" charset="0"/>
                   </a:rPr>
@@ -5123,7 +5149,7 @@
                     <m:r>
                       <a:rPr lang="de-DE" sz="958" b="0" i="1" dirty="0" smtClean="0">
                         <a:solidFill>
-                          <a:srgbClr val="000000"/>
+                          <a:schemeClr val="tx1"/>
                         </a:solidFill>
                         <a:latin typeface="Cambria Math" panose="02040503050406030204" pitchFamily="18" charset="0"/>
                       </a:rPr>
@@ -5132,7 +5158,7 @@
                     <m:r>
                       <a:rPr lang="de-DE" sz="958" b="0" i="1" dirty="0" smtClean="0">
                         <a:solidFill>
-                          <a:srgbClr val="000000"/>
+                          <a:schemeClr val="tx1"/>
                         </a:solidFill>
                         <a:latin typeface="Cambria Math" panose="02040503050406030204" pitchFamily="18" charset="0"/>
                       </a:rPr>
@@ -5141,7 +5167,7 @@
                     <m:r>
                       <a:rPr lang="de-DE" sz="958" b="0" i="1" dirty="0" smtClean="0">
                         <a:solidFill>
-                          <a:srgbClr val="000000"/>
+                          <a:schemeClr val="tx1"/>
                         </a:solidFill>
                         <a:latin typeface="Cambria Math" panose="02040503050406030204" pitchFamily="18" charset="0"/>
                       </a:rPr>
@@ -5152,7 +5178,7 @@
                 <a:r>
                   <a:rPr lang="de-DE" sz="958" dirty="0">
                     <a:solidFill>
-                      <a:srgbClr val="000000"/>
+                      <a:schemeClr val="tx1"/>
                     </a:solidFill>
                     <a:latin typeface="Cambria Math" panose="02040503050406030204" pitchFamily="18" charset="0"/>
                   </a:rPr>
@@ -5244,7 +5270,7 @@
                       <m:r>
                         <a:rPr lang="el-GR" sz="1032" i="1" dirty="0" smtClean="0">
                           <a:solidFill>
-                            <a:srgbClr val="00579D"/>
+                            <a:schemeClr val="tx1"/>
                           </a:solidFill>
                           <a:latin typeface="Cambria Math" panose="02040503050406030204" pitchFamily="18" charset="0"/>
                         </a:rPr>
@@ -5253,6 +5279,11 @@
                     </m:oMath>
                   </m:oMathPara>
                 </a14:m>
+                <a:endParaRPr lang="el-GR">
+                  <a:solidFill>
+                    <a:schemeClr val="tx1"/>
+                  </a:solidFill>
+                </a:endParaRPr>
               </a:p>
             </p:txBody>
           </p:sp>
@@ -5283,7 +5314,7 @@
               <a:blipFill>
                 <a:blip r:embed="rId10"/>
                 <a:stretch>
-                  <a:fillRect l="-52941" t="-26923" r="-76471" b="-50000"/>
+                  <a:fillRect l="-52941" t="-3846" r="-17647" b="-7692"/>
                 </a:stretch>
               </a:blipFill>
             </p:spPr>
@@ -5339,7 +5370,7 @@
                       <m:r>
                         <a:rPr lang="de-DE" sz="1032" b="0" i="1" smtClean="0">
                           <a:solidFill>
-                            <a:srgbClr val="00579D"/>
+                            <a:schemeClr val="tx1"/>
                           </a:solidFill>
                           <a:latin typeface="Cambria Math" panose="02040503050406030204" pitchFamily="18" charset="0"/>
                         </a:rPr>
@@ -5350,7 +5381,7 @@
                 </a14:m>
                 <a:endParaRPr lang="de-DE" sz="1032" dirty="0">
                   <a:solidFill>
-                    <a:srgbClr val="00579D"/>
+                    <a:schemeClr val="tx1"/>
                   </a:solidFill>
                   <a:latin typeface="Cambria Math" panose="02040503050406030204" pitchFamily="18" charset="0"/>
                 </a:endParaRPr>
@@ -5382,7 +5413,7 @@
                 <a:avLst/>
               </a:prstGeom>
               <a:blipFill>
-                <a:blip r:embed="rId11"/>
+                <a:blip r:embed="rId10"/>
                 <a:stretch>
                   <a:fillRect l="-52941" r="-17647" b="-11538"/>
                 </a:stretch>
@@ -5440,7 +5471,7 @@
                       <m:r>
                         <a:rPr lang="de-DE" sz="921" i="1" dirty="0" smtClean="0">
                           <a:solidFill>
-                            <a:srgbClr val="000000"/>
+                            <a:schemeClr val="tx1"/>
                           </a:solidFill>
                           <a:latin typeface="Cambria Math" panose="02040503050406030204" pitchFamily="18" charset="0"/>
                         </a:rPr>
@@ -5449,7 +5480,7 @@
                       <m:r>
                         <a:rPr lang="de-DE" sz="921" i="1" dirty="0" smtClean="0">
                           <a:solidFill>
-                            <a:srgbClr val="000000"/>
+                            <a:schemeClr val="tx1"/>
                           </a:solidFill>
                           <a:latin typeface="Cambria Math" panose="02040503050406030204" pitchFamily="18" charset="0"/>
                         </a:rPr>
@@ -5458,7 +5489,7 @@
                       <m:r>
                         <a:rPr lang="de-DE" sz="921" i="1" dirty="0" smtClean="0">
                           <a:solidFill>
-                            <a:srgbClr val="000000"/>
+                            <a:schemeClr val="tx1"/>
                           </a:solidFill>
                           <a:latin typeface="Cambria Math" panose="02040503050406030204" pitchFamily="18" charset="0"/>
                         </a:rPr>
@@ -5467,7 +5498,7 @@
                       <m:r>
                         <a:rPr lang="de-DE" sz="921" i="1" dirty="0" smtClean="0">
                           <a:solidFill>
-                            <a:srgbClr val="000000"/>
+                            <a:schemeClr val="tx1"/>
                           </a:solidFill>
                           <a:latin typeface="Cambria Math" panose="02040503050406030204" pitchFamily="18" charset="0"/>
                         </a:rPr>
@@ -5476,7 +5507,7 @@
                       <m:r>
                         <a:rPr lang="de-DE" sz="921" i="1" dirty="0" smtClean="0">
                           <a:solidFill>
-                            <a:srgbClr val="000000"/>
+                            <a:schemeClr val="tx1"/>
                           </a:solidFill>
                           <a:latin typeface="Cambria Math" panose="02040503050406030204" pitchFamily="18" charset="0"/>
                         </a:rPr>
@@ -5485,7 +5516,7 @@
                       <m:r>
                         <a:rPr lang="de-DE" sz="921" i="1" dirty="0" smtClean="0">
                           <a:solidFill>
-                            <a:srgbClr val="000000"/>
+                            <a:schemeClr val="tx1"/>
                           </a:solidFill>
                           <a:latin typeface="Cambria Math" panose="02040503050406030204" pitchFamily="18" charset="0"/>
                         </a:rPr>
@@ -5494,7 +5525,7 @@
                       <m:r>
                         <a:rPr lang="de-DE" sz="921" i="1" dirty="0" smtClean="0">
                           <a:solidFill>
-                            <a:srgbClr val="000000"/>
+                            <a:schemeClr val="tx1"/>
                           </a:solidFill>
                           <a:latin typeface="Cambria Math" panose="02040503050406030204" pitchFamily="18" charset="0"/>
                         </a:rPr>
@@ -5503,7 +5534,7 @@
                       <m:r>
                         <a:rPr lang="de-DE" sz="921" i="1" dirty="0" smtClean="0">
                           <a:solidFill>
-                            <a:srgbClr val="000000"/>
+                            <a:schemeClr val="tx1"/>
                           </a:solidFill>
                           <a:latin typeface="Cambria Math" panose="02040503050406030204" pitchFamily="18" charset="0"/>
                         </a:rPr>
@@ -5512,7 +5543,7 @@
                       <m:r>
                         <a:rPr lang="de-DE" sz="921" i="1" dirty="0" smtClean="0">
                           <a:solidFill>
-                            <a:srgbClr val="000000"/>
+                            <a:schemeClr val="tx1"/>
                           </a:solidFill>
                           <a:latin typeface="Cambria Math" panose="02040503050406030204" pitchFamily="18" charset="0"/>
                         </a:rPr>
@@ -5521,6 +5552,11 @@
                     </m:oMath>
                   </m:oMathPara>
                 </a14:m>
+                <a:endParaRPr lang="de-DE">
+                  <a:solidFill>
+                    <a:schemeClr val="tx1"/>
+                  </a:solidFill>
+                </a:endParaRPr>
               </a:p>
             </p:txBody>
           </p:sp>
@@ -5549,9 +5585,9 @@
                 <a:avLst/>
               </a:prstGeom>
               <a:blipFill>
-                <a:blip r:embed="rId12"/>
+                <a:blip r:embed="rId11"/>
                 <a:stretch>
-                  <a:fillRect l="-6400" t="-30435" r="-9600" b="-52174"/>
+                  <a:fillRect l="-6400" r="-3200" b="-34783"/>
                 </a:stretch>
               </a:blipFill>
             </p:spPr>
@@ -5607,7 +5643,7 @@
                       <m:r>
                         <a:rPr lang="de-DE" sz="1032" b="0" i="1" dirty="0" smtClean="0">
                           <a:solidFill>
-                            <a:srgbClr val="B43628"/>
+                            <a:schemeClr val="tx1"/>
                           </a:solidFill>
                           <a:latin typeface="Cambria Math" panose="02040503050406030204" pitchFamily="18" charset="0"/>
                         </a:rPr>
@@ -5616,6 +5652,11 @@
                     </m:oMath>
                   </m:oMathPara>
                 </a14:m>
+                <a:endParaRPr lang="de-DE" dirty="0">
+                  <a:solidFill>
+                    <a:schemeClr val="tx1"/>
+                  </a:solidFill>
+                </a:endParaRPr>
               </a:p>
             </p:txBody>
           </p:sp>
@@ -5644,9 +5685,9 @@
                 <a:avLst/>
               </a:prstGeom>
               <a:blipFill>
-                <a:blip r:embed="rId13"/>
+                <a:blip r:embed="rId12"/>
                 <a:stretch>
-                  <a:fillRect l="-40000" t="-26923" r="-93333" b="-50000"/>
+                  <a:fillRect l="-40000"/>
                 </a:stretch>
               </a:blipFill>
             </p:spPr>
@@ -5702,7 +5743,7 @@
                       <m:r>
                         <a:rPr lang="de-DE" sz="1106" b="0" i="1" smtClean="0">
                           <a:solidFill>
-                            <a:srgbClr val="000000"/>
+                            <a:schemeClr val="tx1"/>
                           </a:solidFill>
                           <a:latin typeface="Cambria Math" panose="02040503050406030204" pitchFamily="18" charset="0"/>
                         </a:rPr>
@@ -5713,7 +5754,7 @@
                 </a14:m>
                 <a:endParaRPr lang="de-DE" sz="1106" dirty="0">
                   <a:solidFill>
-                    <a:srgbClr val="000000"/>
+                    <a:schemeClr val="tx1"/>
                   </a:solidFill>
                   <a:latin typeface="Cambria Math" panose="02040503050406030204" pitchFamily="18" charset="0"/>
                 </a:endParaRPr>
@@ -5745,7 +5786,7 @@
                 <a:avLst/>
               </a:prstGeom>
               <a:blipFill>
-                <a:blip r:embed="rId14"/>
+                <a:blip r:embed="rId13"/>
                 <a:stretch>
                   <a:fillRect l="-61111" r="-33333" b="-35714"/>
                 </a:stretch>
@@ -5821,7 +5862,11 @@
           <a:lstStyle/>
           <a:p>
             <a:pPr algn="ctr"/>
-            <a:endParaRPr lang="de-DE"/>
+            <a:endParaRPr lang="de-DE">
+              <a:solidFill>
+                <a:schemeClr val="tx1"/>
+              </a:solidFill>
+            </a:endParaRPr>
           </a:p>
         </p:txBody>
       </p:sp>
@@ -5889,7 +5934,11 @@
           <a:lstStyle/>
           <a:p>
             <a:pPr algn="ctr"/>
-            <a:endParaRPr lang="de-DE"/>
+            <a:endParaRPr lang="de-DE">
+              <a:solidFill>
+                <a:schemeClr val="tx1"/>
+              </a:solidFill>
+            </a:endParaRPr>
           </a:p>
         </p:txBody>
       </p:sp>
@@ -5930,7 +5979,7 @@
                       <m:r>
                         <a:rPr lang="de-DE" sz="995" b="0" i="1" smtClean="0">
                           <a:solidFill>
-                            <a:srgbClr val="B43628"/>
+                            <a:schemeClr val="tx1"/>
                           </a:solidFill>
                           <a:latin typeface="Cambria Math" panose="02040503050406030204" pitchFamily="18" charset="0"/>
                         </a:rPr>
@@ -5941,7 +5990,7 @@
                           <m:ctrlPr>
                             <a:rPr lang="de-DE" sz="995" b="0" i="1" smtClean="0">
                               <a:solidFill>
-                                <a:srgbClr val="B43628"/>
+                                <a:schemeClr val="tx1"/>
                               </a:solidFill>
                               <a:latin typeface="Cambria Math" panose="02040503050406030204" pitchFamily="18" charset="0"/>
                             </a:rPr>
@@ -5951,7 +6000,7 @@
                           <m:r>
                             <a:rPr lang="de-DE" sz="995" b="0" i="1" smtClean="0">
                               <a:solidFill>
-                                <a:srgbClr val="B43628"/>
+                                <a:schemeClr val="tx1"/>
                               </a:solidFill>
                               <a:latin typeface="Cambria Math" panose="02040503050406030204" pitchFamily="18" charset="0"/>
                             </a:rPr>
@@ -5962,7 +6011,7 @@
                       <m:r>
                         <a:rPr lang="de-DE" sz="995" b="0" i="1" smtClean="0">
                           <a:solidFill>
-                            <a:srgbClr val="B43628"/>
+                            <a:schemeClr val="tx1"/>
                           </a:solidFill>
                           <a:latin typeface="Cambria Math" panose="02040503050406030204" pitchFamily="18" charset="0"/>
                         </a:rPr>
@@ -5971,7 +6020,7 @@
                       <m:r>
                         <a:rPr lang="de-DE" sz="995" b="0" i="1" smtClean="0">
                           <a:solidFill>
-                            <a:srgbClr val="B43628"/>
+                            <a:schemeClr val="tx1"/>
                           </a:solidFill>
                           <a:latin typeface="Cambria Math" panose="02040503050406030204" pitchFamily="18" charset="0"/>
                         </a:rPr>
@@ -5982,7 +6031,7 @@
                 </a14:m>
                 <a:endParaRPr lang="de-DE" sz="995" dirty="0">
                   <a:solidFill>
-                    <a:srgbClr val="B43628"/>
+                    <a:schemeClr val="tx1"/>
                   </a:solidFill>
                   <a:latin typeface="Cambria Math" panose="02040503050406030204" pitchFamily="18" charset="0"/>
                 </a:endParaRPr>
@@ -6014,7 +6063,7 @@
                 <a:avLst/>
               </a:prstGeom>
               <a:blipFill>
-                <a:blip r:embed="rId15"/>
+                <a:blip r:embed="rId14"/>
                 <a:stretch>
                   <a:fillRect l="-11111" r="-1235" b="-36000"/>
                 </a:stretch>
@@ -6072,7 +6121,7 @@
                       <m:r>
                         <a:rPr lang="de-DE" sz="1032" b="0" i="1" dirty="0" smtClean="0">
                           <a:solidFill>
-                            <a:srgbClr val="B43628"/>
+                            <a:schemeClr val="tx1"/>
                           </a:solidFill>
                           <a:latin typeface="Cambria Math" panose="02040503050406030204" pitchFamily="18" charset="0"/>
                         </a:rPr>
@@ -6081,7 +6130,11 @@
                     </m:oMath>
                   </m:oMathPara>
                 </a14:m>
-                <a:endParaRPr dirty="0"/>
+                <a:endParaRPr lang="de-DE" dirty="0">
+                  <a:solidFill>
+                    <a:schemeClr val="tx1"/>
+                  </a:solidFill>
+                </a:endParaRPr>
               </a:p>
             </p:txBody>
           </p:sp>
@@ -6110,7 +6163,7 @@
                 <a:avLst/>
               </a:prstGeom>
               <a:blipFill>
-                <a:blip r:embed="rId16"/>
+                <a:blip r:embed="rId12"/>
                 <a:stretch>
                   <a:fillRect l="-40000"/>
                 </a:stretch>
